--- a/Automated_Customer_Review_Analysis.pptx
+++ b/Automated_Customer_Review_Analysis.pptx
@@ -147,7 +147,7 @@
     </p:spTree>
     <p:extLst>
       <p:ext uri="{BB962C8B-B14F-4D97-AF65-F5344CB8AC3E}">
-        <p14:creationId xmlns:p14="http://schemas.microsoft.com/office/powerpoint/2010/main" val="4226411882"/>
+        <p14:creationId xmlns:p14="http://schemas.microsoft.com/office/powerpoint/2010/main" val="2728729933"/>
       </p:ext>
     </p:extLst>
   </p:cSld>
@@ -1595,7 +1595,7 @@
       </p:sp>
       <p:pic>
         <p:nvPicPr>
-          <p:cNvPr id="5" name="Image 0" descr="preencoded.png"/>
+          <p:cNvPr id="5" name="Image 0" descr="/sessions/intelligent-sleepy-mccarthy/icons/FaRobot_#22D3EE_256.png"/>
           <p:cNvPicPr>
             <a:picLocks noChangeAspect="1"/>
           </p:cNvPicPr>
@@ -3719,7 +3719,7 @@
       </p:sp>
       <p:pic>
         <p:nvPicPr>
-          <p:cNvPr id="18" name="Image 0" descr="preencoded.png"/>
+          <p:cNvPr id="18" name="Image 0" descr="/sessions/intelligent-sleepy-mccarthy/icons/FaLightbulb_#FFFFFF_256.png"/>
           <p:cNvPicPr>
             <a:picLocks noChangeAspect="1"/>
           </p:cNvPicPr>
@@ -4020,7 +4020,7 @@
       </p:sp>
       <p:pic>
         <p:nvPicPr>
-          <p:cNvPr id="6" name="Image 0" descr="preencoded.png"/>
+          <p:cNvPr id="6" name="Image 0" descr="/sessions/intelligent-sleepy-mccarthy/icons/FaDatabase_#065A82_256.png"/>
           <p:cNvPicPr>
             <a:picLocks noChangeAspect="1"/>
           </p:cNvPicPr>
@@ -4145,7 +4145,7 @@
       </p:sp>
       <p:pic>
         <p:nvPicPr>
-          <p:cNvPr id="9" name="Image 1" descr="preencoded.png"/>
+          <p:cNvPr id="9" name="Image 1" descr="/sessions/intelligent-sleepy-mccarthy/icons/FaArrowRight_#94A3B8_256.png"/>
           <p:cNvPicPr>
             <a:picLocks noChangeAspect="1"/>
           </p:cNvPicPr>
@@ -4230,7 +4230,7 @@
       </p:sp>
       <p:pic>
         <p:nvPicPr>
-          <p:cNvPr id="12" name="Image 2" descr="preencoded.png"/>
+          <p:cNvPr id="12" name="Image 2" descr="/sessions/intelligent-sleepy-mccarthy/icons/FaStar_#0891B2_256.png"/>
           <p:cNvPicPr>
             <a:picLocks noChangeAspect="1"/>
           </p:cNvPicPr>
@@ -4355,7 +4355,7 @@
       </p:sp>
       <p:pic>
         <p:nvPicPr>
-          <p:cNvPr id="15" name="Image 3" descr="preencoded.png"/>
+          <p:cNvPr id="15" name="Image 3" descr="/sessions/intelligent-sleepy-mccarthy/icons/FaArrowRight_#94A3B8_256.png"/>
           <p:cNvPicPr>
             <a:picLocks noChangeAspect="1"/>
           </p:cNvPicPr>
@@ -4440,7 +4440,7 @@
       </p:sp>
       <p:pic>
         <p:nvPicPr>
-          <p:cNvPr id="18" name="Image 4" descr="preencoded.png"/>
+          <p:cNvPr id="18" name="Image 4" descr="/sessions/intelligent-sleepy-mccarthy/icons/FaChartBar_#22D3EE_256.png"/>
           <p:cNvPicPr>
             <a:picLocks noChangeAspect="1"/>
           </p:cNvPicPr>
@@ -4626,7 +4626,7 @@
       </p:sp>
       <p:pic>
         <p:nvPicPr>
-          <p:cNvPr id="23" name="Image 5" descr="preencoded.png"/>
+          <p:cNvPr id="23" name="Image 5" descr="/sessions/intelligent-sleepy-mccarthy/icons/FaBrain_#0891B2_256.png"/>
           <p:cNvPicPr>
             <a:picLocks noChangeAspect="1"/>
           </p:cNvPicPr>
@@ -4751,7 +4751,7 @@
       </p:sp>
       <p:pic>
         <p:nvPicPr>
-          <p:cNvPr id="26" name="Image 6" descr="preencoded.png"/>
+          <p:cNvPr id="26" name="Image 6" descr="/sessions/intelligent-sleepy-mccarthy/icons/FaArrowRight_#94A3B8_256.png"/>
           <p:cNvPicPr>
             <a:picLocks noChangeAspect="1"/>
           </p:cNvPicPr>
@@ -4836,7 +4836,7 @@
       </p:sp>
       <p:pic>
         <p:nvPicPr>
-          <p:cNvPr id="29" name="Image 7" descr="preencoded.png"/>
+          <p:cNvPr id="29" name="Image 7" descr="/sessions/intelligent-sleepy-mccarthy/icons/FaLayerGroup_#065A82_256.png"/>
           <p:cNvPicPr>
             <a:picLocks noChangeAspect="1"/>
           </p:cNvPicPr>
@@ -4961,7 +4961,7 @@
       </p:sp>
       <p:pic>
         <p:nvPicPr>
-          <p:cNvPr id="32" name="Image 8" descr="preencoded.png"/>
+          <p:cNvPr id="32" name="Image 8" descr="/sessions/intelligent-sleepy-mccarthy/icons/FaArrowRight_#94A3B8_256.png"/>
           <p:cNvPicPr>
             <a:picLocks noChangeAspect="1"/>
           </p:cNvPicPr>
@@ -5046,7 +5046,7 @@
       </p:sp>
       <p:pic>
         <p:nvPicPr>
-          <p:cNvPr id="35" name="Image 9" descr="preencoded.png"/>
+          <p:cNvPr id="35" name="Image 9" descr="/sessions/intelligent-sleepy-mccarthy/icons/FaPen_#0891B2_256.png"/>
           <p:cNvPicPr>
             <a:picLocks noChangeAspect="1"/>
           </p:cNvPicPr>
@@ -6265,7 +6265,7 @@
         </p:nvSpPr>
         <p:spPr>
           <a:xfrm>
-            <a:off x="4663440" y="2743200"/>
+            <a:off x="4631113" y="2775204"/>
             <a:ext cx="4114800" cy="1645920"/>
           </a:xfrm>
           <a:prstGeom prst="rect">
@@ -6287,7 +6287,7 @@
           <a:bodyPr/>
           <a:lstStyle/>
           <a:p>
-            <a:endParaRPr lang="en-DE" dirty="0"/>
+            <a:endParaRPr lang="en-DE"/>
           </a:p>
         </p:txBody>
       </p:sp>
@@ -6404,8 +6404,8 @@
         </p:nvSpPr>
         <p:spPr>
           <a:xfrm>
-            <a:off x="5760720" y="3310128"/>
-            <a:ext cx="2476375" cy="100584"/>
+            <a:off x="5757698" y="3322883"/>
+            <a:ext cx="2194560" cy="65353"/>
           </a:xfrm>
           <a:prstGeom prst="rect">
             <a:avLst/>
@@ -6433,8 +6433,8 @@
         </p:nvSpPr>
         <p:spPr>
           <a:xfrm>
-            <a:off x="8279067" y="3227734"/>
-            <a:ext cx="457200" cy="274320"/>
+            <a:off x="7969159" y="3291840"/>
+            <a:ext cx="548640" cy="112955"/>
           </a:xfrm>
           <a:prstGeom prst="rect">
             <a:avLst/>
@@ -6458,7 +6458,7 @@
                 <a:ea typeface="Calibri" pitchFamily="34" charset="-122"/>
                 <a:cs typeface="Calibri" pitchFamily="34" charset="-120"/>
               </a:rPr>
-              <a:t>25,545</a:t>
+              <a:t>25,500</a:t>
             </a:r>
             <a:endParaRPr lang="en-US" sz="800" dirty="0"/>
           </a:p>
@@ -6472,8 +6472,76 @@
         </p:nvSpPr>
         <p:spPr>
           <a:xfrm>
-            <a:off x="5760720" y="3441892"/>
-            <a:ext cx="411480" cy="95188"/>
+            <a:off x="5760883" y="3409080"/>
+            <a:ext cx="274320" cy="77847"/>
+          </a:xfrm>
+          <a:prstGeom prst="rect">
+            <a:avLst/>
+          </a:prstGeom>
+          <a:solidFill>
+            <a:srgbClr val="EF4444">
+              <a:alpha val="70000"/>
+            </a:srgbClr>
+          </a:solidFill>
+          <a:ln/>
+        </p:spPr>
+        <p:txBody>
+          <a:bodyPr/>
+          <a:lstStyle/>
+          <a:p>
+            <a:endParaRPr lang="en-DE"/>
+          </a:p>
+        </p:txBody>
+      </p:sp>
+      <p:sp>
+        <p:nvSpPr>
+          <p:cNvPr id="36" name="Text 34"/>
+          <p:cNvSpPr/>
+          <p:nvPr/>
+        </p:nvSpPr>
+        <p:spPr>
+          <a:xfrm>
+            <a:off x="6065299" y="3324909"/>
+            <a:ext cx="548640" cy="226568"/>
+          </a:xfrm>
+          <a:prstGeom prst="rect">
+            <a:avLst/>
+          </a:prstGeom>
+          <a:noFill/>
+          <a:ln/>
+        </p:spPr>
+        <p:txBody>
+          <a:bodyPr wrap="square" lIns="0" tIns="0" rIns="0" bIns="0" rtlCol="0" anchor="ctr"/>
+          <a:lstStyle/>
+          <a:p>
+            <a:pPr marL="0" indent="0">
+              <a:buNone/>
+            </a:pPr>
+            <a:r>
+              <a:rPr lang="en-US" sz="800" dirty="0">
+                <a:solidFill>
+                  <a:srgbClr val="EF4444"/>
+                </a:solidFill>
+                <a:latin typeface="Calibri" pitchFamily="34" charset="0"/>
+                <a:ea typeface="Calibri" pitchFamily="34" charset="-122"/>
+                <a:cs typeface="Calibri" pitchFamily="34" charset="-120"/>
+              </a:rPr>
+              <a:t>1,580</a:t>
+            </a:r>
+            <a:endParaRPr lang="en-US" sz="800" dirty="0"/>
+          </a:p>
+        </p:txBody>
+      </p:sp>
+      <p:sp>
+        <p:nvSpPr>
+          <p:cNvPr id="37" name="Shape 35"/>
+          <p:cNvSpPr/>
+          <p:nvPr/>
+        </p:nvSpPr>
+        <p:spPr>
+          <a:xfrm>
+            <a:off x="5759912" y="3500960"/>
+            <a:ext cx="182880" cy="65353"/>
           </a:xfrm>
           <a:prstGeom prst="rect">
             <a:avLst/>
@@ -6495,14 +6563,14 @@
       </p:sp>
       <p:sp>
         <p:nvSpPr>
-          <p:cNvPr id="36" name="Text 34"/>
-          <p:cNvSpPr/>
-          <p:nvPr/>
-        </p:nvSpPr>
-        <p:spPr>
-          <a:xfrm>
-            <a:off x="6217920" y="3355304"/>
-            <a:ext cx="457200" cy="274320"/>
+          <p:cNvPr id="38" name="Text 36"/>
+          <p:cNvSpPr/>
+          <p:nvPr/>
+        </p:nvSpPr>
+        <p:spPr>
+          <a:xfrm>
+            <a:off x="5972888" y="3404590"/>
+            <a:ext cx="548640" cy="274320"/>
           </a:xfrm>
           <a:prstGeom prst="rect">
             <a:avLst/>
@@ -6523,9 +6591,10 @@
                   <a:srgbClr val="F59E0B"/>
                 </a:solidFill>
                 <a:latin typeface="Calibri" pitchFamily="34" charset="0"/>
+                <a:ea typeface="Calibri" pitchFamily="34" charset="-122"/>
                 <a:cs typeface="Calibri" pitchFamily="34" charset="-120"/>
               </a:rPr>
-              <a:t>1,581</a:t>
+              <a:t>1,206</a:t>
             </a:r>
             <a:endParaRPr lang="en-US" sz="800" dirty="0"/>
           </a:p>
@@ -6533,14 +6602,82 @@
       </p:sp>
       <p:sp>
         <p:nvSpPr>
-          <p:cNvPr id="37" name="Shape 35"/>
-          <p:cNvSpPr/>
-          <p:nvPr/>
-        </p:nvSpPr>
-        <p:spPr>
-          <a:xfrm>
-            <a:off x="5760720" y="3574480"/>
-            <a:ext cx="320040" cy="100584"/>
+          <p:cNvPr id="39" name="Text 37"/>
+          <p:cNvSpPr/>
+          <p:nvPr/>
+        </p:nvSpPr>
+        <p:spPr>
+          <a:xfrm>
+            <a:off x="4892040" y="3977640"/>
+            <a:ext cx="914400" cy="274320"/>
+          </a:xfrm>
+          <a:prstGeom prst="rect">
+            <a:avLst/>
+          </a:prstGeom>
+          <a:noFill/>
+          <a:ln/>
+        </p:spPr>
+        <p:txBody>
+          <a:bodyPr wrap="square" lIns="0" tIns="0" rIns="0" bIns="0" rtlCol="0" anchor="ctr"/>
+          <a:lstStyle/>
+          <a:p>
+            <a:pPr marL="0" indent="0">
+              <a:buNone/>
+            </a:pPr>
+            <a:r>
+              <a:rPr lang="en-US" sz="1000" dirty="0">
+                <a:solidFill>
+                  <a:srgbClr val="64748B"/>
+                </a:solidFill>
+                <a:latin typeface="Calibri" pitchFamily="34" charset="0"/>
+                <a:ea typeface="Calibri" pitchFamily="34" charset="-122"/>
+                <a:cs typeface="Calibri" pitchFamily="34" charset="-120"/>
+              </a:rPr>
+              <a:t>After:</a:t>
+            </a:r>
+            <a:endParaRPr lang="en-US" sz="1000" dirty="0"/>
+          </a:p>
+        </p:txBody>
+      </p:sp>
+      <p:sp>
+        <p:nvSpPr>
+          <p:cNvPr id="40" name="Shape 38"/>
+          <p:cNvSpPr/>
+          <p:nvPr/>
+        </p:nvSpPr>
+        <p:spPr>
+          <a:xfrm>
+            <a:off x="5757698" y="4016906"/>
+            <a:ext cx="502920" cy="65353"/>
+          </a:xfrm>
+          <a:prstGeom prst="rect">
+            <a:avLst/>
+          </a:prstGeom>
+          <a:solidFill>
+            <a:srgbClr val="10B981">
+              <a:alpha val="70000"/>
+            </a:srgbClr>
+          </a:solidFill>
+          <a:ln/>
+        </p:spPr>
+        <p:txBody>
+          <a:bodyPr/>
+          <a:lstStyle/>
+          <a:p>
+            <a:endParaRPr lang="en-DE"/>
+          </a:p>
+        </p:txBody>
+      </p:sp>
+      <p:sp>
+        <p:nvSpPr>
+          <p:cNvPr id="41" name="Shape 39"/>
+          <p:cNvSpPr/>
+          <p:nvPr/>
+        </p:nvSpPr>
+        <p:spPr>
+          <a:xfrm>
+            <a:off x="5757698" y="4101891"/>
+            <a:ext cx="502920" cy="65353"/>
           </a:xfrm>
           <a:prstGeom prst="rect">
             <a:avLst/>
@@ -6562,121 +6699,14 @@
       </p:sp>
       <p:sp>
         <p:nvSpPr>
-          <p:cNvPr id="38" name="Text 36"/>
-          <p:cNvSpPr/>
-          <p:nvPr/>
-        </p:nvSpPr>
-        <p:spPr>
-          <a:xfrm>
-            <a:off x="6122732" y="3483236"/>
-            <a:ext cx="457200" cy="274320"/>
-          </a:xfrm>
-          <a:prstGeom prst="rect">
-            <a:avLst/>
-          </a:prstGeom>
-          <a:noFill/>
-          <a:ln/>
-        </p:spPr>
-        <p:txBody>
-          <a:bodyPr wrap="square" lIns="0" tIns="0" rIns="0" bIns="0" rtlCol="0" anchor="ctr"/>
-          <a:lstStyle/>
-          <a:p>
-            <a:pPr marL="0" indent="0">
-              <a:buNone/>
-            </a:pPr>
-            <a:r>
-              <a:rPr lang="en-US" sz="800" dirty="0">
-                <a:solidFill>
-                  <a:srgbClr val="EF4444"/>
-                </a:solidFill>
-                <a:latin typeface="Calibri" pitchFamily="34" charset="0"/>
-                <a:ea typeface="Calibri" pitchFamily="34" charset="-122"/>
-                <a:cs typeface="Calibri" pitchFamily="34" charset="-120"/>
-              </a:rPr>
-              <a:t>2,028</a:t>
-            </a:r>
-            <a:endParaRPr lang="en-US" sz="800" dirty="0"/>
-          </a:p>
-        </p:txBody>
-      </p:sp>
-      <p:sp>
-        <p:nvSpPr>
-          <p:cNvPr id="39" name="Text 37"/>
-          <p:cNvSpPr/>
-          <p:nvPr/>
-        </p:nvSpPr>
-        <p:spPr>
-          <a:xfrm>
-            <a:off x="4892040" y="3977640"/>
-            <a:ext cx="914400" cy="274320"/>
-          </a:xfrm>
-          <a:prstGeom prst="rect">
-            <a:avLst/>
-          </a:prstGeom>
-          <a:noFill/>
-          <a:ln/>
-        </p:spPr>
-        <p:txBody>
-          <a:bodyPr wrap="square" lIns="0" tIns="0" rIns="0" bIns="0" rtlCol="0" anchor="ctr"/>
-          <a:lstStyle/>
-          <a:p>
-            <a:pPr marL="0" indent="0">
-              <a:buNone/>
-            </a:pPr>
-            <a:r>
-              <a:rPr lang="en-US" sz="1000" dirty="0">
-                <a:solidFill>
-                  <a:srgbClr val="64748B"/>
-                </a:solidFill>
-                <a:latin typeface="Calibri" pitchFamily="34" charset="0"/>
-                <a:ea typeface="Calibri" pitchFamily="34" charset="-122"/>
-                <a:cs typeface="Calibri" pitchFamily="34" charset="-120"/>
-              </a:rPr>
-              <a:t>After:</a:t>
-            </a:r>
-            <a:endParaRPr lang="en-US" sz="1000" dirty="0"/>
-          </a:p>
-        </p:txBody>
-      </p:sp>
-      <p:sp>
-        <p:nvSpPr>
-          <p:cNvPr id="40" name="Shape 38"/>
-          <p:cNvSpPr/>
-          <p:nvPr/>
-        </p:nvSpPr>
-        <p:spPr>
-          <a:xfrm>
-            <a:off x="5760720" y="3821667"/>
-            <a:ext cx="1463040" cy="100584"/>
-          </a:xfrm>
-          <a:prstGeom prst="rect">
-            <a:avLst/>
-          </a:prstGeom>
-          <a:solidFill>
-            <a:srgbClr val="10B981">
-              <a:alpha val="70000"/>
-            </a:srgbClr>
-          </a:solidFill>
-          <a:ln/>
-        </p:spPr>
-        <p:txBody>
-          <a:bodyPr/>
-          <a:lstStyle/>
-          <a:p>
-            <a:endParaRPr lang="en-DE"/>
-          </a:p>
-        </p:txBody>
-      </p:sp>
-      <p:sp>
-        <p:nvSpPr>
-          <p:cNvPr id="41" name="Shape 39"/>
-          <p:cNvSpPr/>
-          <p:nvPr/>
-        </p:nvSpPr>
-        <p:spPr>
-          <a:xfrm>
-            <a:off x="5760720" y="3959229"/>
-            <a:ext cx="1463040" cy="95610"/>
+          <p:cNvPr id="42" name="Shape 40"/>
+          <p:cNvSpPr/>
+          <p:nvPr/>
+        </p:nvSpPr>
+        <p:spPr>
+          <a:xfrm>
+            <a:off x="5760720" y="4188050"/>
+            <a:ext cx="502920" cy="65353"/>
           </a:xfrm>
           <a:prstGeom prst="rect">
             <a:avLst/>
@@ -6698,42 +6728,13 @@
       </p:sp>
       <p:sp>
         <p:nvSpPr>
-          <p:cNvPr id="42" name="Shape 40"/>
-          <p:cNvSpPr/>
-          <p:nvPr/>
-        </p:nvSpPr>
-        <p:spPr>
-          <a:xfrm>
-            <a:off x="5760720" y="4092239"/>
-            <a:ext cx="1463040" cy="95610"/>
-          </a:xfrm>
-          <a:prstGeom prst="rect">
-            <a:avLst/>
-          </a:prstGeom>
-          <a:solidFill>
-            <a:srgbClr val="EF4444">
-              <a:alpha val="70000"/>
-            </a:srgbClr>
-          </a:solidFill>
-          <a:ln/>
-        </p:spPr>
-        <p:txBody>
-          <a:bodyPr/>
-          <a:lstStyle/>
-          <a:p>
-            <a:endParaRPr lang="en-DE"/>
-          </a:p>
-        </p:txBody>
-      </p:sp>
-      <p:sp>
-        <p:nvSpPr>
           <p:cNvPr id="43" name="Text 41"/>
           <p:cNvSpPr/>
           <p:nvPr/>
         </p:nvSpPr>
         <p:spPr>
           <a:xfrm>
-            <a:off x="7283918" y="4001849"/>
+            <a:off x="6296962" y="3977640"/>
             <a:ext cx="914400" cy="274320"/>
           </a:xfrm>
           <a:prstGeom prst="rect">
@@ -6977,7 +6978,7 @@
       </p:sp>
       <p:pic>
         <p:nvPicPr>
-          <p:cNvPr id="5" name="Image 0" descr="preencoded.png"/>
+          <p:cNvPr id="5" name="Image 0" descr="/sessions/intelligent-sleepy-mccarthy/icons/FaBrain_#22D3EE_256.png"/>
           <p:cNvPicPr>
             <a:picLocks noChangeAspect="1"/>
           </p:cNvPicPr>
@@ -8901,7 +8902,7 @@
       </p:sp>
       <p:pic>
         <p:nvPicPr>
-          <p:cNvPr id="6" name="Image 0" descr="preencoded.png"/>
+          <p:cNvPr id="6" name="Image 0" descr="/sessions/intelligent-sleepy-mccarthy/icons/FaExclamationTriangle_#EF4444_256.png"/>
           <p:cNvPicPr>
             <a:picLocks noChangeAspect="1"/>
           </p:cNvPicPr>
@@ -9003,7 +9004,7 @@
       </p:sp>
       <p:pic>
         <p:nvPicPr>
-          <p:cNvPr id="9" name="Image 1" descr="preencoded.png"/>
+          <p:cNvPr id="9" name="Image 1" descr="/sessions/intelligent-sleepy-mccarthy/icons/FaArrowRight_#64748B_256.png"/>
           <p:cNvPicPr>
             <a:picLocks noChangeAspect="1"/>
           </p:cNvPicPr>
@@ -9083,7 +9084,7 @@
       </p:sp>
       <p:pic>
         <p:nvPicPr>
-          <p:cNvPr id="12" name="Image 2" descr="preencoded.png"/>
+          <p:cNvPr id="12" name="Image 2" descr="/sessions/intelligent-sleepy-mccarthy/icons/FaCheckCircle_#10B981_256.png"/>
           <p:cNvPicPr>
             <a:picLocks noChangeAspect="1"/>
           </p:cNvPicPr>
@@ -10458,7 +10459,7 @@
       </p:sp>
       <p:pic>
         <p:nvPicPr>
-          <p:cNvPr id="7" name="Image 0" descr="preencoded.png"/>
+          <p:cNvPr id="7" name="Image 0" descr="/sessions/intelligent-sleepy-mccarthy/icons/FaCog_#0891B2_256.png"/>
           <p:cNvPicPr>
             <a:picLocks noChangeAspect="1"/>
           </p:cNvPicPr>
@@ -10690,7 +10691,7 @@
       </p:sp>
       <p:pic>
         <p:nvPicPr>
-          <p:cNvPr id="11" name="Image 1" descr="preencoded.png"/>
+          <p:cNvPr id="11" name="Image 1" descr="/sessions/intelligent-sleepy-mccarthy/icons/FaQuoteLeft_#22D3EE_256.png"/>
           <p:cNvPicPr>
             <a:picLocks noChangeAspect="1"/>
           </p:cNvPicPr>
@@ -12520,7 +12521,7 @@
       </p:sp>
       <p:pic>
         <p:nvPicPr>
-          <p:cNvPr id="4" name="Image 0" descr="preencoded.png"/>
+          <p:cNvPr id="4" name="Image 0" descr="/sessions/intelligent-sleepy-mccarthy/icons/FaExclamationTriangle_#F59E0B_256.png"/>
           <p:cNvPicPr>
             <a:picLocks noChangeAspect="1"/>
           </p:cNvPicPr>
@@ -13009,7 +13010,7 @@
       </p:sp>
       <p:pic>
         <p:nvPicPr>
-          <p:cNvPr id="18" name="Image 1" descr="preencoded.png"/>
+          <p:cNvPr id="18" name="Image 1" descr="/sessions/intelligent-sleepy-mccarthy/icons/FaCheckCircle_#10B981_256.png"/>
           <p:cNvPicPr>
             <a:picLocks noChangeAspect="1"/>
           </p:cNvPicPr>
